--- a/public/level3/downloads/slides/Level3_Lesson7_Slides.pptx
+++ b/public/level3/downloads/slides/Level3_Lesson7_Slides.pptx
@@ -1497,7 +1497,7 @@
           </a:p>
           <a:p>
             <a:r>
-              <a:t>The audio (about 1:15) is coming soon. When it is ready, it plays the conversation once; press play again for play 2. Until then, read the listening script (at the end of these notes) with a volunteer.</a:t>
+              <a:t>The audio (L3_L7_listening.mp3, about 1:17) plays the conversation once. Press play again for play 2. A third play is fine if the class needs it.</a:t>
             </a:r>
           </a:p>
           <a:p>
@@ -1507,7 +1507,7 @@
           </a:p>
           <a:p>
             <a:r>
-              <a:t>Audio: the listening audio for this lesson (about 1:15) is coming soon. It will use computer-generated voices (Chatterbox TTS cloned from synthetic Kokoro-82M reference clips); no recordings of real people. Until it is ready, read the listening script (in the notes of the Before You Listen slide) with a volunteer. The names and the story are invented.</a:t>
+              <a:t>Audio: synthetic voices, computer-generated (Chatterbox TTS cloned from Kokoro-82M reference clips). No recordings of real people. The names and the story are invented.</a:t>
             </a:r>
           </a:p>
           <a:p>
@@ -1518,101 +1518,6 @@
           <a:p>
             <a:r>
               <a:t>Picture: Twemoji graphics by Twitter, Inc. and other contributors (https://github.com/jdecked/twemoji), CC BY 4.0 (https://creativecommons.org/licenses/by/4.0/); resized and combined, with speech bubbles, signs, and labels (images/CREDITS.md).</a:t>
-            </a:r>
-          </a:p>
-          <a:p>
-            <a:r>
-              <a:t>Listening script (the audio is coming soon; until then, read it aloud with a volunteer at a normal, friendly speed):</a:t>
-            </a:r>
-          </a:p>
-          <a:p>
-            <a:r>
-              <a:t>Narrator: Lesson seven. Listening. Lina is at the service desk at Valley Mart. Listen.</a:t>
-            </a:r>
-          </a:p>
-          <a:p>
-            <a:r>
-              <a:t>Clerk: Hi. Can I help you?</a:t>
-            </a:r>
-          </a:p>
-          <a:p>
-            <a:r>
-              <a:t>Lina: Yes, I'd like to return this phone case.</a:t>
-            </a:r>
-          </a:p>
-          <a:p>
-            <a:r>
-              <a:t>Clerk: OK. What's wrong with it?</a:t>
-            </a:r>
-          </a:p>
-          <a:p>
-            <a:r>
-              <a:t>Lina: It's too small. It doesn't fit my phone.</a:t>
-            </a:r>
-          </a:p>
-          <a:p>
-            <a:r>
-              <a:t>Clerk: I see. Do you have the receipt?</a:t>
-            </a:r>
-          </a:p>
-          <a:p>
-            <a:r>
-              <a:t>Lina: No, sorry. I lost it. Could I get a refund?</a:t>
-            </a:r>
-          </a:p>
-          <a:p>
-            <a:r>
-              <a:t>Clerk: Sorry, you need the receipt for a refund. But I can give you store credit.</a:t>
-            </a:r>
-          </a:p>
-          <a:p>
-            <a:r>
-              <a:t>Lina: OK, that's fine. I'd like a bigger case.</a:t>
-            </a:r>
-          </a:p>
-          <a:p>
-            <a:r>
-              <a:t>Clerk: Sure. The bigger cases are in aisle five.</a:t>
-            </a:r>
-          </a:p>
-          <a:p>
-            <a:r>
-              <a:t>Lina: Thanks. Also, I have an appointment at your eye center on Monday. I'd like to change it.</a:t>
-            </a:r>
-          </a:p>
-          <a:p>
-            <a:r>
-              <a:t>Clerk: No problem. I can do that here. What day is good for you?</a:t>
-            </a:r>
-          </a:p>
-          <a:p>
-            <a:r>
-              <a:t>Lina: Is Thursday available?</a:t>
-            </a:r>
-          </a:p>
-          <a:p>
-            <a:r>
-              <a:t>Clerk: Let me check. Yes, Thursday at four thirty is available.</a:t>
-            </a:r>
-          </a:p>
-          <a:p>
-            <a:r>
-              <a:t>Lina: Perfect. I'd like to take that time.</a:t>
-            </a:r>
-          </a:p>
-          <a:p>
-            <a:r>
-              <a:t>Clerk: OK. Your new appointment is Thursday at four thirty.</a:t>
-            </a:r>
-          </a:p>
-          <a:p>
-            <a:r>
-              <a:t>Lina: Thank you so much.</a:t>
-            </a:r>
-          </a:p>
-          <a:p>
-            <a:r>
-              <a:t>Narrator: That's the end of the listening.</a:t>
             </a:r>
           </a:p>
         </p:txBody>
@@ -2737,7 +2642,7 @@
           </a:p>
           <a:p>
             <a:r>
-              <a:t>Audio: the listening audio for this lesson (about 1:15) is coming soon. It will use computer-generated voices (Chatterbox TTS cloned from synthetic Kokoro-82M reference clips); no recordings of real people. Until it is ready, read the listening script (in the notes of the Before You Listen slide) with a volunteer. The names and the story are invented.</a:t>
+              <a:t>Audio: synthetic voices, computer-generated (Chatterbox TTS cloned from Kokoro-82M reference clips). No recordings of real people. The names and the story are invented.</a:t>
             </a:r>
           </a:p>
           <a:p>
@@ -12554,7 +12459,7 @@
                 <a:ea typeface="Lexend Deca" pitchFamily="34" charset="-122"/>
                 <a:cs typeface="Lexend Deca" pitchFamily="34" charset="-120"/>
               </a:rPr>
-              <a:t>Audio: about 1:15. It plays once.</a:t>
+              <a:t>Audio: about 1:17. It plays once.</a:t>
             </a:r>
             <a:endParaRPr lang="en-US" sz="2200" dirty="0"/>
           </a:p>
@@ -31444,7 +31349,7 @@
                 <a:ea typeface="Lexend Deca" pitchFamily="34" charset="-122"/>
                 <a:cs typeface="Lexend Deca" pitchFamily="34" charset="-120"/>
               </a:rPr>
-              <a:t>Audio (coming soon): synthetic voices made with Chatterbox TTS (MIT License), cloned from short synthetic reference clips made with Kokoro-82M (Apache License 2.0). No recordings of real people. Each file will carry an inaudible Perth watermark marking it as AI-generated. Font: Lexend Deca (OFL 1.1).</a:t>
+              <a:t>Audio: synthetic voices made with Chatterbox TTS (MIT License), cloned from short synthetic reference clips made with Kokoro-82M (Apache License 2.0). No recordings of real people were used. Each file carries an inaudible Perth watermark marking it as AI-generated. Font: Lexend Deca (OFL 1.1).</a:t>
             </a:r>
             <a:endParaRPr lang="en-US" sz="1350" dirty="0" b="0"/>
           </a:p>
